--- a/Jeevanjot_Singh_FNE.pptx
+++ b/Jeevanjot_Singh_FNE.pptx
@@ -7,11 +7,12 @@
   <p:sldIdLst>
     <p:sldId id="256" r:id="rId2"/>
     <p:sldId id="260" r:id="rId3"/>
-    <p:sldId id="262" r:id="rId4"/>
-    <p:sldId id="257" r:id="rId5"/>
-    <p:sldId id="263" r:id="rId6"/>
-    <p:sldId id="261" r:id="rId7"/>
-    <p:sldId id="264" r:id="rId8"/>
+    <p:sldId id="261" r:id="rId4"/>
+    <p:sldId id="262" r:id="rId5"/>
+    <p:sldId id="257" r:id="rId6"/>
+    <p:sldId id="263" r:id="rId7"/>
+    <p:sldId id="265" r:id="rId8"/>
+    <p:sldId id="264" r:id="rId9"/>
   </p:sldIdLst>
   <p:sldSz cx="12192000" cy="6858000"/>
   <p:notesSz cx="6858000" cy="9144000"/>
@@ -7631,6 +7632,109 @@
 <file path=ppt/slides/slide3.xml><?xml version="1.0" encoding="utf-8"?>
 <p:sld xmlns:a="http://schemas.openxmlformats.org/drawingml/2006/main" xmlns:r="http://schemas.openxmlformats.org/officeDocument/2006/relationships" xmlns:p="http://schemas.openxmlformats.org/presentationml/2006/main">
   <p:cSld>
+    <p:spTree>
+      <p:nvGrpSpPr>
+        <p:cNvPr id="1" name=""/>
+        <p:cNvGrpSpPr/>
+        <p:nvPr/>
+      </p:nvGrpSpPr>
+      <p:grpSpPr>
+        <a:xfrm>
+          <a:off x="0" y="0"/>
+          <a:ext cx="0" cy="0"/>
+          <a:chOff x="0" y="0"/>
+          <a:chExt cx="0" cy="0"/>
+        </a:xfrm>
+      </p:grpSpPr>
+      <p:sp>
+        <p:nvSpPr>
+          <p:cNvPr id="2" name="Title 1">
+            <a:extLst>
+              <a:ext uri="{FF2B5EF4-FFF2-40B4-BE49-F238E27FC236}">
+                <a16:creationId xmlns:a16="http://schemas.microsoft.com/office/drawing/2014/main" id="{BA146201-F99F-43AF-403A-385348114347}"/>
+              </a:ext>
+            </a:extLst>
+          </p:cNvPr>
+          <p:cNvSpPr>
+            <a:spLocks noGrp="1"/>
+          </p:cNvSpPr>
+          <p:nvPr>
+            <p:ph type="title"/>
+          </p:nvPr>
+        </p:nvSpPr>
+        <p:spPr>
+          <a:xfrm>
+            <a:off x="-3788833" y="261257"/>
+            <a:ext cx="10353762" cy="970450"/>
+          </a:xfrm>
+        </p:spPr>
+        <p:txBody>
+          <a:bodyPr/>
+          <a:lstStyle/>
+          <a:p>
+            <a:r>
+              <a:rPr lang="en-US" dirty="0"/>
+              <a:t>HLD</a:t>
+            </a:r>
+            <a:endParaRPr lang="en-IN" dirty="0"/>
+          </a:p>
+        </p:txBody>
+      </p:sp>
+      <p:pic>
+        <p:nvPicPr>
+          <p:cNvPr id="5" name="Content Placeholder 4">
+            <a:extLst>
+              <a:ext uri="{FF2B5EF4-FFF2-40B4-BE49-F238E27FC236}">
+                <a16:creationId xmlns:a16="http://schemas.microsoft.com/office/drawing/2014/main" id="{0EF22E76-F67F-8379-06C0-57E8031AA60C}"/>
+              </a:ext>
+            </a:extLst>
+          </p:cNvPr>
+          <p:cNvPicPr>
+            <a:picLocks noGrp="1" noChangeAspect="1"/>
+          </p:cNvPicPr>
+          <p:nvPr>
+            <p:ph idx="1"/>
+          </p:nvPr>
+        </p:nvPicPr>
+        <p:blipFill>
+          <a:blip r:embed="rId2"/>
+          <a:stretch>
+            <a:fillRect/>
+          </a:stretch>
+        </p:blipFill>
+        <p:spPr>
+          <a:xfrm>
+            <a:off x="3113314" y="14133"/>
+            <a:ext cx="9078686" cy="6857246"/>
+          </a:xfrm>
+          <a:prstGeom prst="rect">
+            <a:avLst/>
+          </a:prstGeom>
+          <a:effectLst>
+            <a:outerShdw blurRad="25400" dir="17880000">
+              <a:srgbClr val="000000">
+                <a:alpha val="46000"/>
+              </a:srgbClr>
+            </a:outerShdw>
+          </a:effectLst>
+        </p:spPr>
+      </p:pic>
+    </p:spTree>
+    <p:extLst>
+      <p:ext uri="{BB962C8B-B14F-4D97-AF65-F5344CB8AC3E}">
+        <p14:creationId xmlns:p14="http://schemas.microsoft.com/office/powerpoint/2010/main" val="3215655109"/>
+      </p:ext>
+    </p:extLst>
+  </p:cSld>
+  <p:clrMapOvr>
+    <a:masterClrMapping/>
+  </p:clrMapOvr>
+</p:sld>
+</file>
+
+<file path=ppt/slides/slide4.xml><?xml version="1.0" encoding="utf-8"?>
+<p:sld xmlns:a="http://schemas.openxmlformats.org/drawingml/2006/main" xmlns:r="http://schemas.openxmlformats.org/officeDocument/2006/relationships" xmlns:p="http://schemas.openxmlformats.org/presentationml/2006/main">
+  <p:cSld>
     <p:bg>
       <p:bgPr>
         <a:blipFill rotWithShape="1">
@@ -10244,7 +10348,7 @@
 </p:sld>
 </file>
 
-<file path=ppt/slides/slide4.xml><?xml version="1.0" encoding="utf-8"?>
+<file path=ppt/slides/slide5.xml><?xml version="1.0" encoding="utf-8"?>
 <p:sld xmlns:a="http://schemas.openxmlformats.org/drawingml/2006/main" xmlns:r="http://schemas.openxmlformats.org/officeDocument/2006/relationships" xmlns:p="http://schemas.openxmlformats.org/presentationml/2006/main">
   <p:cSld>
     <p:bg>
@@ -10994,7 +11098,7 @@
 </p:sld>
 </file>
 
-<file path=ppt/slides/slide5.xml><?xml version="1.0" encoding="utf-8"?>
+<file path=ppt/slides/slide6.xml><?xml version="1.0" encoding="utf-8"?>
 <p:sld xmlns:a="http://schemas.openxmlformats.org/drawingml/2006/main" xmlns:r="http://schemas.openxmlformats.org/officeDocument/2006/relationships" xmlns:p="http://schemas.openxmlformats.org/presentationml/2006/main">
   <p:cSld>
     <p:spTree>
@@ -11106,7 +11210,7 @@
 </p:sld>
 </file>
 
-<file path=ppt/slides/slide6.xml><?xml version="1.0" encoding="utf-8"?>
+<file path=ppt/slides/slide7.xml><?xml version="1.0" encoding="utf-8"?>
 <p:sld xmlns:a="http://schemas.openxmlformats.org/drawingml/2006/main" xmlns:r="http://schemas.openxmlformats.org/officeDocument/2006/relationships" xmlns:p="http://schemas.openxmlformats.org/presentationml/2006/main">
   <p:cSld>
     <p:spTree>
@@ -11128,7 +11232,7 @@
           <p:cNvPr id="2" name="Title 1">
             <a:extLst>
               <a:ext uri="{FF2B5EF4-FFF2-40B4-BE49-F238E27FC236}">
-                <a16:creationId xmlns:a16="http://schemas.microsoft.com/office/drawing/2014/main" id="{BA146201-F99F-43AF-403A-385348114347}"/>
+                <a16:creationId xmlns:a16="http://schemas.microsoft.com/office/drawing/2014/main" id="{7016923A-C425-EA25-824D-ED828EF167E5}"/>
               </a:ext>
             </a:extLst>
           </p:cNvPr>
@@ -11139,67 +11243,164 @@
             <p:ph type="title"/>
           </p:nvPr>
         </p:nvSpPr>
-        <p:spPr>
-          <a:xfrm>
-            <a:off x="-3788833" y="261257"/>
-            <a:ext cx="10353762" cy="970450"/>
-          </a:xfrm>
-        </p:spPr>
-        <p:txBody>
-          <a:bodyPr/>
+        <p:spPr/>
+        <p:txBody>
+          <a:bodyPr>
+            <a:normAutofit fontScale="90000"/>
+          </a:bodyPr>
           <a:lstStyle/>
           <a:p>
             <a:r>
-              <a:rPr lang="en-US" dirty="0"/>
-              <a:t>HLD</a:t>
-            </a:r>
+              <a:rPr lang="en-US" b="1" dirty="0">
+                <a:effectLst/>
+              </a:rPr>
+              <a:t>Challenges and Solutions</a:t>
+            </a:r>
+            <a:br>
+              <a:rPr lang="en-US" b="1" dirty="0">
+                <a:effectLst/>
+              </a:rPr>
+            </a:br>
             <a:endParaRPr lang="en-IN" dirty="0"/>
           </a:p>
         </p:txBody>
       </p:sp>
-      <p:pic>
-        <p:nvPicPr>
-          <p:cNvPr id="5" name="Content Placeholder 4">
+      <p:sp>
+        <p:nvSpPr>
+          <p:cNvPr id="3" name="Content Placeholder 2">
             <a:extLst>
               <a:ext uri="{FF2B5EF4-FFF2-40B4-BE49-F238E27FC236}">
-                <a16:creationId xmlns:a16="http://schemas.microsoft.com/office/drawing/2014/main" id="{0EF22E76-F67F-8379-06C0-57E8031AA60C}"/>
+                <a16:creationId xmlns:a16="http://schemas.microsoft.com/office/drawing/2014/main" id="{995915D5-EB40-99F6-44E4-EB40790CD1DC}"/>
               </a:ext>
             </a:extLst>
           </p:cNvPr>
-          <p:cNvPicPr>
-            <a:picLocks noGrp="1" noChangeAspect="1"/>
-          </p:cNvPicPr>
+          <p:cNvSpPr>
+            <a:spLocks noGrp="1"/>
+          </p:cNvSpPr>
           <p:nvPr>
             <p:ph idx="1"/>
           </p:nvPr>
-        </p:nvPicPr>
-        <p:blipFill>
-          <a:blip r:embed="rId2"/>
-          <a:stretch>
-            <a:fillRect/>
-          </a:stretch>
-        </p:blipFill>
-        <p:spPr>
-          <a:xfrm>
-            <a:off x="3113314" y="14133"/>
-            <a:ext cx="9078686" cy="6857246"/>
-          </a:xfrm>
-          <a:prstGeom prst="rect">
-            <a:avLst/>
-          </a:prstGeom>
-          <a:effectLst>
-            <a:outerShdw blurRad="25400" dir="17880000">
-              <a:srgbClr val="000000">
-                <a:alpha val="46000"/>
-              </a:srgbClr>
-            </a:outerShdw>
-          </a:effectLst>
-        </p:spPr>
-      </p:pic>
+        </p:nvSpPr>
+        <p:spPr/>
+        <p:txBody>
+          <a:bodyPr>
+            <a:normAutofit lnSpcReduction="10000"/>
+          </a:bodyPr>
+          <a:lstStyle/>
+          <a:p>
+            <a:pPr fontAlgn="base"/>
+            <a:r>
+              <a:rPr lang="en-US" dirty="0">
+                <a:effectLst/>
+              </a:rPr>
+              <a:t>During implementation, several technical challenges emerged that required iterative problem-solving. </a:t>
+            </a:r>
+            <a:r>
+              <a:rPr lang="en-US" b="1" dirty="0">
+                <a:effectLst/>
+              </a:rPr>
+              <a:t>First</a:t>
+            </a:r>
+            <a:r>
+              <a:rPr lang="en-US" dirty="0">
+                <a:effectLst/>
+              </a:rPr>
+              <a:t>, the AWS IoT SDK's publish() method returns a tuple (future, </a:t>
+            </a:r>
+            <a:r>
+              <a:rPr lang="en-US" dirty="0" err="1">
+                <a:effectLst/>
+              </a:rPr>
+              <a:t>packet_id</a:t>
+            </a:r>
+            <a:r>
+              <a:rPr lang="en-US" dirty="0">
+                <a:effectLst/>
+              </a:rPr>
+              <a:t>) rather than a single object, which initially caused </a:t>
+            </a:r>
+            <a:r>
+              <a:rPr lang="en-US" dirty="0" err="1">
+                <a:effectLst/>
+              </a:rPr>
+              <a:t>AttributeError</a:t>
+            </a:r>
+            <a:r>
+              <a:rPr lang="en-US" dirty="0">
+                <a:effectLst/>
+              </a:rPr>
+              <a:t> when calling .result() directly—this was resolved by properly unpacking the tuple before awaiting the future. </a:t>
+            </a:r>
+          </a:p>
+          <a:p>
+            <a:pPr fontAlgn="base"/>
+            <a:r>
+              <a:rPr lang="en-US" b="1" dirty="0">
+                <a:effectLst/>
+              </a:rPr>
+              <a:t>Second</a:t>
+            </a:r>
+            <a:r>
+              <a:rPr lang="en-US" dirty="0">
+                <a:effectLst/>
+              </a:rPr>
+              <a:t>, DynamoDB's strict typing rejected Python float values, necessitating conversion to Decimal types using a recursive </a:t>
+            </a:r>
+            <a:r>
+              <a:rPr lang="en-US" dirty="0" err="1">
+                <a:effectLst/>
+              </a:rPr>
+              <a:t>float_to_decimal</a:t>
+            </a:r>
+            <a:r>
+              <a:rPr lang="en-US" dirty="0">
+                <a:effectLst/>
+              </a:rPr>
+              <a:t>() helper function. </a:t>
+            </a:r>
+            <a:r>
+              <a:rPr lang="en-US" b="1" dirty="0">
+                <a:effectLst/>
+              </a:rPr>
+              <a:t>Third</a:t>
+            </a:r>
+            <a:r>
+              <a:rPr lang="en-US" dirty="0">
+                <a:effectLst/>
+              </a:rPr>
+              <a:t>, GitHub's secret scanning blocked commits containing hardcoded AWS credentials, requiring migration to GitHub Secrets for secure CICD authentication</a:t>
+            </a:r>
+            <a:r>
+              <a:rPr lang="en-US">
+                <a:effectLst/>
+              </a:rPr>
+              <a:t>. </a:t>
+            </a:r>
+          </a:p>
+          <a:p>
+            <a:pPr fontAlgn="base"/>
+            <a:r>
+              <a:rPr lang="en-US" b="1">
+                <a:effectLst/>
+              </a:rPr>
+              <a:t>Finally</a:t>
+            </a:r>
+            <a:r>
+              <a:rPr lang="en-US" dirty="0">
+                <a:effectLst/>
+              </a:rPr>
+              <a:t>, Elastic Beanstalk deployment failed due to version label length limits (100 characters), which was solved by using shorter labels based on GitHub run numbers rather than full commit SHAs. These experiences reinforced the importance of careful API documentation review and robust error handling in cloud-native applications.</a:t>
+            </a:r>
+          </a:p>
+          <a:p>
+            <a:endParaRPr lang="en-IN" dirty="0"/>
+          </a:p>
+        </p:txBody>
+      </p:sp>
     </p:spTree>
     <p:extLst>
       <p:ext uri="{BB962C8B-B14F-4D97-AF65-F5344CB8AC3E}">
-        <p14:creationId xmlns:p14="http://schemas.microsoft.com/office/powerpoint/2010/main" val="3215655109"/>
+        <p14:creationId xmlns:p14="http://schemas.microsoft.com/office/powerpoint/2010/main" val="164319412"/>
       </p:ext>
     </p:extLst>
   </p:cSld>
@@ -11209,7 +11410,7 @@
 </p:sld>
 </file>
 
-<file path=ppt/slides/slide7.xml><?xml version="1.0" encoding="utf-8"?>
+<file path=ppt/slides/slide8.xml><?xml version="1.0" encoding="utf-8"?>
 <p:sld xmlns:a="http://schemas.openxmlformats.org/drawingml/2006/main" xmlns:r="http://schemas.openxmlformats.org/officeDocument/2006/relationships" xmlns:p="http://schemas.openxmlformats.org/presentationml/2006/main">
   <p:cSld>
     <p:bg>
